--- a/ai_engine/gen/templates/default.pptx
+++ b/ai_engine/gen/templates/default.pptx
@@ -7,8 +7,10 @@
   <p:sldIdLst>
     <p:sldId id="256" r:id="rId7"/>
     <p:sldId id="257" r:id="rId8"/>
+    <p:sldId id="258" r:id="rId9"/>
+    <p:sldId id="259" r:id="rId10"/>
   </p:sldIdLst>
-  <p:sldSz cx="9144000" cy="6858000" type="screen4x3"/>
+  <p:sldSz cx="12191999" cy="6858000" type="screen4x3"/>
   <p:notesSz cx="6858000" cy="9144000"/>
   <p:defaultTextStyle>
     <a:defPPr>
@@ -3085,7 +3087,7 @@
     <p:bg>
       <p:bgPr>
         <a:solidFill>
-          <a:srgbClr val="1A73E8"/>
+          <a:srgbClr val="245B78"/>
         </a:solidFill>
         <a:effectLst/>
       </p:bgPr>
@@ -3099,120 +3101,20 @@
       <p:grpSpPr/>
       <p:sp>
         <p:nvSpPr>
-          <p:cNvPr id="2" name="TextBox 1"/>
-          <p:cNvSpPr txBox="1"/>
-          <p:nvPr/>
-        </p:nvSpPr>
-        <p:spPr>
-          <a:xfrm>
-            <a:off x="914400" y="2286000"/>
-            <a:ext cx="7315200" cy="1371600"/>
-          </a:xfrm>
-          <a:prstGeom prst="rect">
-            <a:avLst/>
-          </a:prstGeom>
-          <a:noFill/>
-        </p:spPr>
-        <p:txBody>
-          <a:bodyPr wrap="square">
-            <a:spAutoFit/>
-          </a:bodyPr>
-          <a:lstStyle/>
-          <a:p>
-            <a:pPr algn="ctr">
-              <a:defRPr sz="4000" b="1">
-                <a:solidFill>
-                  <a:srgbClr val="FFFFFF"/>
-                </a:solidFill>
-              </a:defRPr>
-            </a:pPr>
-            <a:r>
-              <a:t>课件标题</a:t>
-            </a:r>
-          </a:p>
-          <a:p>
-            <a:pPr algn="ctr">
-              <a:defRPr sz="2000">
-                <a:solidFill>
-                  <a:srgbClr val="DDDDDD"/>
-                </a:solidFill>
-              </a:defRPr>
-            </a:pPr>
-            <a:r>
-              <a:t>AI 智能生成课件</a:t>
-            </a:r>
-          </a:p>
-        </p:txBody>
-      </p:sp>
-    </p:spTree>
-  </p:cSld>
-  <p:clrMapOvr>
-    <a:masterClrMapping/>
-  </p:clrMapOvr>
-</p:sld>
-</file>
-
-<file path=ppt/slides/slide2.xml><?xml version="1.0" encoding="utf-8"?>
-<p:sld xmlns:a="http://schemas.openxmlformats.org/drawingml/2006/main" xmlns:p="http://schemas.openxmlformats.org/presentationml/2006/main" xmlns:r="http://schemas.openxmlformats.org/officeDocument/2006/relationships">
-  <p:cSld>
-    <p:spTree>
-      <p:nvGrpSpPr>
-        <p:cNvPr id="1" name=""/>
-        <p:cNvGrpSpPr/>
-        <p:nvPr/>
-      </p:nvGrpSpPr>
-      <p:grpSpPr/>
-      <p:sp>
-        <p:nvSpPr>
-          <p:cNvPr id="2" name="TextBox 1"/>
-          <p:cNvSpPr txBox="1"/>
-          <p:nvPr/>
-        </p:nvSpPr>
-        <p:spPr>
-          <a:xfrm>
-            <a:off x="457200" y="274320"/>
-            <a:ext cx="8229600" cy="731520"/>
-          </a:xfrm>
-          <a:prstGeom prst="rect">
-            <a:avLst/>
-          </a:prstGeom>
-          <a:noFill/>
-        </p:spPr>
-        <p:txBody>
-          <a:bodyPr wrap="square">
-            <a:spAutoFit/>
-          </a:bodyPr>
-          <a:lstStyle/>
-          <a:p>
-            <a:pPr>
-              <a:defRPr sz="2800" b="1">
-                <a:solidFill>
-                  <a:srgbClr val="1A73E8"/>
-                </a:solidFill>
-              </a:defRPr>
-            </a:pPr>
-            <a:r>
-              <a:t>第一节 课程导入</a:t>
-            </a:r>
-          </a:p>
-        </p:txBody>
-      </p:sp>
-      <p:sp>
-        <p:nvSpPr>
-          <p:cNvPr id="3" name="Rectangle 2"/>
+          <p:cNvPr id="2" name="Rectangle 1"/>
           <p:cNvSpPr/>
           <p:nvPr/>
         </p:nvSpPr>
         <p:spPr>
           <a:xfrm>
-            <a:off x="457200" y="1005840"/>
-            <a:ext cx="8229600" cy="27432"/>
+            <a:off x="0" y="0"/>
+            <a:ext cx="210312" cy="6858000"/>
           </a:xfrm>
           <a:prstGeom prst="rect">
             <a:avLst/>
           </a:prstGeom>
           <a:solidFill>
-            <a:srgbClr val="1A73E8"/>
+            <a:srgbClr val="E89B52"/>
           </a:solidFill>
           <a:ln>
             <a:noFill/>
@@ -3242,14 +3144,57 @@
       </p:sp>
       <p:sp>
         <p:nvSpPr>
+          <p:cNvPr id="3" name="Rectangle 2"/>
+          <p:cNvSpPr/>
+          <p:nvPr/>
+        </p:nvSpPr>
+        <p:spPr>
+          <a:xfrm>
+            <a:off x="210312" y="6327648"/>
+            <a:ext cx="11978640" cy="530352"/>
+          </a:xfrm>
+          <a:prstGeom prst="rect">
+            <a:avLst/>
+          </a:prstGeom>
+          <a:solidFill>
+            <a:srgbClr val="2F7E83"/>
+          </a:solidFill>
+          <a:ln>
+            <a:noFill/>
+          </a:ln>
+        </p:spPr>
+        <p:style>
+          <a:lnRef idx="1">
+            <a:schemeClr val="accent1"/>
+          </a:lnRef>
+          <a:fillRef idx="3">
+            <a:schemeClr val="accent1"/>
+          </a:fillRef>
+          <a:effectRef idx="2">
+            <a:schemeClr val="accent1"/>
+          </a:effectRef>
+          <a:fontRef idx="minor">
+            <a:schemeClr val="lt1"/>
+          </a:fontRef>
+        </p:style>
+        <p:txBody>
+          <a:bodyPr rtlCol="0" anchor="ctr"/>
+          <a:lstStyle/>
+          <a:p>
+            <a:pPr algn="ctr"/>
+          </a:p>
+        </p:txBody>
+      </p:sp>
+      <p:sp>
+        <p:nvSpPr>
           <p:cNvPr id="4" name="TextBox 3"/>
           <p:cNvSpPr txBox="1"/>
           <p:nvPr/>
         </p:nvSpPr>
         <p:spPr>
           <a:xfrm>
-            <a:off x="457200" y="1371600"/>
-            <a:ext cx="8229600" cy="2743200"/>
+            <a:off x="960120" y="1965960"/>
+            <a:ext cx="10149840" cy="1508760"/>
           </a:xfrm>
           <a:prstGeom prst="rect">
             <a:avLst/>
@@ -3257,23 +3202,1686 @@
           <a:noFill/>
         </p:spPr>
         <p:txBody>
-          <a:bodyPr wrap="square">
-            <a:spAutoFit/>
+          <a:bodyPr wrap="square" anchor="ctr" lIns="18288" rIns="18288" tIns="9144" bIns="9144">
+            <a:noAutofit/>
+          </a:bodyPr>
+          <a:lstStyle/>
+          <a:p>
+            <a:pPr algn="l">
+              <a:defRPr sz="5000" b="1">
+                <a:solidFill>
+                  <a:srgbClr val="FFFFFF"/>
+                </a:solidFill>
+                <a:latin typeface="Microsoft YaHei"/>
+              </a:defRPr>
+            </a:pPr>
+            <a:r>
+              <a:t>课程主题</a:t>
+            </a:r>
+          </a:p>
+        </p:txBody>
+      </p:sp>
+      <p:sp>
+        <p:nvSpPr>
+          <p:cNvPr id="5" name="TextBox 4"/>
+          <p:cNvSpPr txBox="1"/>
+          <p:nvPr/>
+        </p:nvSpPr>
+        <p:spPr>
+          <a:xfrm>
+            <a:off x="987552" y="3703320"/>
+            <a:ext cx="8961120" cy="868680"/>
+          </a:xfrm>
+          <a:prstGeom prst="rect">
+            <a:avLst/>
+          </a:prstGeom>
+          <a:noFill/>
+        </p:spPr>
+        <p:txBody>
+          <a:bodyPr wrap="square" anchor="t" lIns="18288" rIns="18288" tIns="9144" bIns="9144">
+            <a:noAutofit/>
+          </a:bodyPr>
+          <a:lstStyle/>
+          <a:p>
+            <a:pPr algn="l">
+              <a:defRPr sz="2800" b="0">
+                <a:solidFill>
+                  <a:srgbClr val="FFFFFF"/>
+                </a:solidFill>
+                <a:latin typeface="Microsoft YaHei"/>
+              </a:defRPr>
+            </a:pPr>
+            <a:r>
+              <a:t>授课对象 · 课时 · 教学目标</a:t>
+            </a:r>
+          </a:p>
+        </p:txBody>
+      </p:sp>
+      <p:sp>
+        <p:nvSpPr>
+          <p:cNvPr id="6" name="TextBox 5"/>
+          <p:cNvSpPr txBox="1"/>
+          <p:nvPr/>
+        </p:nvSpPr>
+        <p:spPr>
+          <a:xfrm>
+            <a:off x="987552" y="5660136"/>
+            <a:ext cx="3108960" cy="274320"/>
+          </a:xfrm>
+          <a:prstGeom prst="rect">
+            <a:avLst/>
+          </a:prstGeom>
+          <a:noFill/>
+        </p:spPr>
+        <p:txBody>
+          <a:bodyPr wrap="square" anchor="t" lIns="18288" rIns="18288" tIns="9144" bIns="9144">
+            <a:noAutofit/>
+          </a:bodyPr>
+          <a:lstStyle/>
+          <a:p>
+            <a:pPr algn="l">
+              <a:defRPr sz="1100" b="1">
+                <a:solidFill>
+                  <a:srgbClr val="FFFFFF"/>
+                </a:solidFill>
+                <a:latin typeface="Microsoft YaHei"/>
+              </a:defRPr>
+            </a:pPr>
+            <a:r>
+              <a:t>通用教学</a:t>
+            </a:r>
+          </a:p>
+        </p:txBody>
+      </p:sp>
+    </p:spTree>
+  </p:cSld>
+  <p:clrMapOvr>
+    <a:masterClrMapping/>
+  </p:clrMapOvr>
+</p:sld>
+</file>
+
+<file path=ppt/slides/slide2.xml><?xml version="1.0" encoding="utf-8"?>
+<p:sld xmlns:a="http://schemas.openxmlformats.org/drawingml/2006/main" xmlns:p="http://schemas.openxmlformats.org/presentationml/2006/main" xmlns:r="http://schemas.openxmlformats.org/officeDocument/2006/relationships">
+  <p:cSld>
+    <p:bg>
+      <p:bgPr>
+        <a:solidFill>
+          <a:srgbClr val="F5F8FA"/>
+        </a:solidFill>
+        <a:effectLst/>
+      </p:bgPr>
+    </p:bg>
+    <p:spTree>
+      <p:nvGrpSpPr>
+        <p:cNvPr id="1" name=""/>
+        <p:cNvGrpSpPr/>
+        <p:nvPr/>
+      </p:nvGrpSpPr>
+      <p:grpSpPr/>
+      <p:sp>
+        <p:nvSpPr>
+          <p:cNvPr id="2" name="TextBox 1"/>
+          <p:cNvSpPr txBox="1"/>
+          <p:nvPr/>
+        </p:nvSpPr>
+        <p:spPr>
+          <a:xfrm>
+            <a:off x="11292840" y="6446520"/>
+            <a:ext cx="411480" cy="201168"/>
+          </a:xfrm>
+          <a:prstGeom prst="rect">
+            <a:avLst/>
+          </a:prstGeom>
+          <a:noFill/>
+        </p:spPr>
+        <p:txBody>
+          <a:bodyPr wrap="square" anchor="t" lIns="18288" rIns="18288" tIns="9144" bIns="9144">
+            <a:noAutofit/>
+          </a:bodyPr>
+          <a:lstStyle/>
+          <a:p>
+            <a:pPr algn="r">
+              <a:defRPr sz="900" b="0">
+                <a:solidFill>
+                  <a:srgbClr val="627987"/>
+                </a:solidFill>
+                <a:latin typeface="Microsoft YaHei"/>
+              </a:defRPr>
+            </a:pPr>
+            <a:r>
+              <a:t>2</a:t>
+            </a:r>
+          </a:p>
+        </p:txBody>
+      </p:sp>
+      <p:sp>
+        <p:nvSpPr>
+          <p:cNvPr id="3" name="TextBox 2"/>
+          <p:cNvSpPr txBox="1"/>
+          <p:nvPr/>
+        </p:nvSpPr>
+        <p:spPr>
+          <a:xfrm>
+            <a:off x="685800" y="365760"/>
+            <a:ext cx="2011680" cy="219456"/>
+          </a:xfrm>
+          <a:prstGeom prst="rect">
+            <a:avLst/>
+          </a:prstGeom>
+          <a:noFill/>
+        </p:spPr>
+        <p:txBody>
+          <a:bodyPr wrap="square" anchor="t" lIns="18288" rIns="18288" tIns="9144" bIns="9144">
+            <a:noAutofit/>
+          </a:bodyPr>
+          <a:lstStyle/>
+          <a:p>
+            <a:pPr algn="l">
+              <a:defRPr sz="1000" b="1">
+                <a:solidFill>
+                  <a:srgbClr val="E89B52"/>
+                </a:solidFill>
+                <a:latin typeface="Microsoft YaHei"/>
+              </a:defRPr>
+            </a:pPr>
+            <a:r>
+              <a:t>AGENDA</a:t>
+            </a:r>
+          </a:p>
+        </p:txBody>
+      </p:sp>
+      <p:sp>
+        <p:nvSpPr>
+          <p:cNvPr id="4" name="TextBox 3"/>
+          <p:cNvSpPr txBox="1"/>
+          <p:nvPr/>
+        </p:nvSpPr>
+        <p:spPr>
+          <a:xfrm>
+            <a:off x="658368" y="640080"/>
+            <a:ext cx="10744200" cy="512064"/>
+          </a:xfrm>
+          <a:prstGeom prst="rect">
+            <a:avLst/>
+          </a:prstGeom>
+          <a:noFill/>
+        </p:spPr>
+        <p:txBody>
+          <a:bodyPr wrap="square" anchor="t" lIns="18288" rIns="18288" tIns="9144" bIns="9144">
+            <a:noAutofit/>
+          </a:bodyPr>
+          <a:lstStyle/>
+          <a:p>
+            <a:pPr algn="l">
+              <a:defRPr sz="3400" b="1">
+                <a:solidFill>
+                  <a:srgbClr val="183042"/>
+                </a:solidFill>
+                <a:latin typeface="Microsoft YaHei"/>
+              </a:defRPr>
+            </a:pPr>
+            <a:r>
+              <a:t>课程目录</a:t>
+            </a:r>
+          </a:p>
+        </p:txBody>
+      </p:sp>
+      <p:sp>
+        <p:nvSpPr>
+          <p:cNvPr id="5" name="Rectangle 4"/>
+          <p:cNvSpPr/>
+          <p:nvPr/>
+        </p:nvSpPr>
+        <p:spPr>
+          <a:xfrm>
+            <a:off x="658368" y="1161288"/>
+            <a:ext cx="10863072" cy="18288"/>
+          </a:xfrm>
+          <a:prstGeom prst="rect">
+            <a:avLst/>
+          </a:prstGeom>
+          <a:solidFill>
+            <a:srgbClr val="2F7E83"/>
+          </a:solidFill>
+          <a:ln>
+            <a:noFill/>
+          </a:ln>
+        </p:spPr>
+        <p:style>
+          <a:lnRef idx="1">
+            <a:schemeClr val="accent1"/>
+          </a:lnRef>
+          <a:fillRef idx="3">
+            <a:schemeClr val="accent1"/>
+          </a:fillRef>
+          <a:effectRef idx="2">
+            <a:schemeClr val="accent1"/>
+          </a:effectRef>
+          <a:fontRef idx="minor">
+            <a:schemeClr val="lt1"/>
+          </a:fontRef>
+        </p:style>
+        <p:txBody>
+          <a:bodyPr rtlCol="0" anchor="ctr"/>
+          <a:lstStyle/>
+          <a:p>
+            <a:pPr algn="ctr"/>
+          </a:p>
+        </p:txBody>
+      </p:sp>
+      <p:sp>
+        <p:nvSpPr>
+          <p:cNvPr id="6" name="TextBox 5"/>
+          <p:cNvSpPr txBox="1"/>
+          <p:nvPr/>
+        </p:nvSpPr>
+        <p:spPr>
+          <a:xfrm>
+            <a:off x="868680" y="1417320"/>
+            <a:ext cx="640080" cy="438912"/>
+          </a:xfrm>
+          <a:prstGeom prst="rect">
+            <a:avLst/>
+          </a:prstGeom>
+          <a:noFill/>
+        </p:spPr>
+        <p:txBody>
+          <a:bodyPr wrap="square" anchor="t" lIns="18288" rIns="18288" tIns="9144" bIns="9144">
+            <a:noAutofit/>
+          </a:bodyPr>
+          <a:lstStyle/>
+          <a:p>
+            <a:pPr algn="l">
+              <a:defRPr sz="1900" b="1">
+                <a:solidFill>
+                  <a:srgbClr val="E89B52"/>
+                </a:solidFill>
+                <a:latin typeface="Microsoft YaHei"/>
+              </a:defRPr>
+            </a:pPr>
+            <a:r>
+              <a:t>01</a:t>
+            </a:r>
+          </a:p>
+        </p:txBody>
+      </p:sp>
+      <p:sp>
+        <p:nvSpPr>
+          <p:cNvPr id="7" name="TextBox 6"/>
+          <p:cNvSpPr txBox="1"/>
+          <p:nvPr/>
+        </p:nvSpPr>
+        <p:spPr>
+          <a:xfrm>
+            <a:off x="1691640" y="1399032"/>
+            <a:ext cx="9372600" cy="530352"/>
+          </a:xfrm>
+          <a:prstGeom prst="rect">
+            <a:avLst/>
+          </a:prstGeom>
+          <a:noFill/>
+        </p:spPr>
+        <p:txBody>
+          <a:bodyPr wrap="square" anchor="t" lIns="18288" rIns="18288" tIns="9144" bIns="9144">
+            <a:noAutofit/>
+          </a:bodyPr>
+          <a:lstStyle/>
+          <a:p>
+            <a:pPr algn="l">
+              <a:defRPr sz="2500" b="0">
+                <a:solidFill>
+                  <a:srgbClr val="183042"/>
+                </a:solidFill>
+                <a:latin typeface="Microsoft YaHei"/>
+              </a:defRPr>
+            </a:pPr>
+            <a:r>
+              <a:t>课程导入</a:t>
+            </a:r>
+          </a:p>
+        </p:txBody>
+      </p:sp>
+      <p:sp>
+        <p:nvSpPr>
+          <p:cNvPr id="8" name="Rectangle 7"/>
+          <p:cNvSpPr/>
+          <p:nvPr/>
+        </p:nvSpPr>
+        <p:spPr>
+          <a:xfrm>
+            <a:off x="1691640" y="1911095"/>
+            <a:ext cx="9098280" cy="10972"/>
+          </a:xfrm>
+          <a:prstGeom prst="rect">
+            <a:avLst/>
+          </a:prstGeom>
+          <a:solidFill>
+            <a:srgbClr val="627987"/>
+          </a:solidFill>
+          <a:ln>
+            <a:noFill/>
+          </a:ln>
+        </p:spPr>
+        <p:style>
+          <a:lnRef idx="1">
+            <a:schemeClr val="accent1"/>
+          </a:lnRef>
+          <a:fillRef idx="3">
+            <a:schemeClr val="accent1"/>
+          </a:fillRef>
+          <a:effectRef idx="2">
+            <a:schemeClr val="accent1"/>
+          </a:effectRef>
+          <a:fontRef idx="minor">
+            <a:schemeClr val="lt1"/>
+          </a:fontRef>
+        </p:style>
+        <p:txBody>
+          <a:bodyPr rtlCol="0" anchor="ctr"/>
+          <a:lstStyle/>
+          <a:p>
+            <a:pPr algn="ctr"/>
+          </a:p>
+        </p:txBody>
+      </p:sp>
+      <p:sp>
+        <p:nvSpPr>
+          <p:cNvPr id="9" name="TextBox 8"/>
+          <p:cNvSpPr txBox="1"/>
+          <p:nvPr/>
+        </p:nvSpPr>
+        <p:spPr>
+          <a:xfrm>
+            <a:off x="868680" y="2121408"/>
+            <a:ext cx="640080" cy="438912"/>
+          </a:xfrm>
+          <a:prstGeom prst="rect">
+            <a:avLst/>
+          </a:prstGeom>
+          <a:noFill/>
+        </p:spPr>
+        <p:txBody>
+          <a:bodyPr wrap="square" anchor="t" lIns="18288" rIns="18288" tIns="9144" bIns="9144">
+            <a:noAutofit/>
+          </a:bodyPr>
+          <a:lstStyle/>
+          <a:p>
+            <a:pPr algn="l">
+              <a:defRPr sz="1900" b="1">
+                <a:solidFill>
+                  <a:srgbClr val="E89B52"/>
+                </a:solidFill>
+                <a:latin typeface="Microsoft YaHei"/>
+              </a:defRPr>
+            </a:pPr>
+            <a:r>
+              <a:t>02</a:t>
+            </a:r>
+          </a:p>
+        </p:txBody>
+      </p:sp>
+      <p:sp>
+        <p:nvSpPr>
+          <p:cNvPr id="10" name="TextBox 9"/>
+          <p:cNvSpPr txBox="1"/>
+          <p:nvPr/>
+        </p:nvSpPr>
+        <p:spPr>
+          <a:xfrm>
+            <a:off x="1691640" y="2103120"/>
+            <a:ext cx="9372600" cy="530352"/>
+          </a:xfrm>
+          <a:prstGeom prst="rect">
+            <a:avLst/>
+          </a:prstGeom>
+          <a:noFill/>
+        </p:spPr>
+        <p:txBody>
+          <a:bodyPr wrap="square" anchor="t" lIns="18288" rIns="18288" tIns="9144" bIns="9144">
+            <a:noAutofit/>
+          </a:bodyPr>
+          <a:lstStyle/>
+          <a:p>
+            <a:pPr algn="l">
+              <a:defRPr sz="2500" b="0">
+                <a:solidFill>
+                  <a:srgbClr val="183042"/>
+                </a:solidFill>
+                <a:latin typeface="Microsoft YaHei"/>
+              </a:defRPr>
+            </a:pPr>
+            <a:r>
+              <a:t>核心概念</a:t>
+            </a:r>
+          </a:p>
+        </p:txBody>
+      </p:sp>
+      <p:sp>
+        <p:nvSpPr>
+          <p:cNvPr id="11" name="Rectangle 10"/>
+          <p:cNvSpPr/>
+          <p:nvPr/>
+        </p:nvSpPr>
+        <p:spPr>
+          <a:xfrm>
+            <a:off x="1691640" y="2615184"/>
+            <a:ext cx="9098280" cy="10972"/>
+          </a:xfrm>
+          <a:prstGeom prst="rect">
+            <a:avLst/>
+          </a:prstGeom>
+          <a:solidFill>
+            <a:srgbClr val="627987"/>
+          </a:solidFill>
+          <a:ln>
+            <a:noFill/>
+          </a:ln>
+        </p:spPr>
+        <p:style>
+          <a:lnRef idx="1">
+            <a:schemeClr val="accent1"/>
+          </a:lnRef>
+          <a:fillRef idx="3">
+            <a:schemeClr val="accent1"/>
+          </a:fillRef>
+          <a:effectRef idx="2">
+            <a:schemeClr val="accent1"/>
+          </a:effectRef>
+          <a:fontRef idx="minor">
+            <a:schemeClr val="lt1"/>
+          </a:fontRef>
+        </p:style>
+        <p:txBody>
+          <a:bodyPr rtlCol="0" anchor="ctr"/>
+          <a:lstStyle/>
+          <a:p>
+            <a:pPr algn="ctr"/>
+          </a:p>
+        </p:txBody>
+      </p:sp>
+      <p:sp>
+        <p:nvSpPr>
+          <p:cNvPr id="12" name="TextBox 11"/>
+          <p:cNvSpPr txBox="1"/>
+          <p:nvPr/>
+        </p:nvSpPr>
+        <p:spPr>
+          <a:xfrm>
+            <a:off x="868680" y="2825496"/>
+            <a:ext cx="640080" cy="438912"/>
+          </a:xfrm>
+          <a:prstGeom prst="rect">
+            <a:avLst/>
+          </a:prstGeom>
+          <a:noFill/>
+        </p:spPr>
+        <p:txBody>
+          <a:bodyPr wrap="square" anchor="t" lIns="18288" rIns="18288" tIns="9144" bIns="9144">
+            <a:noAutofit/>
+          </a:bodyPr>
+          <a:lstStyle/>
+          <a:p>
+            <a:pPr algn="l">
+              <a:defRPr sz="1900" b="1">
+                <a:solidFill>
+                  <a:srgbClr val="E89B52"/>
+                </a:solidFill>
+                <a:latin typeface="Microsoft YaHei"/>
+              </a:defRPr>
+            </a:pPr>
+            <a:r>
+              <a:t>03</a:t>
+            </a:r>
+          </a:p>
+        </p:txBody>
+      </p:sp>
+      <p:sp>
+        <p:nvSpPr>
+          <p:cNvPr id="13" name="TextBox 12"/>
+          <p:cNvSpPr txBox="1"/>
+          <p:nvPr/>
+        </p:nvSpPr>
+        <p:spPr>
+          <a:xfrm>
+            <a:off x="1691640" y="2807208"/>
+            <a:ext cx="9372600" cy="530352"/>
+          </a:xfrm>
+          <a:prstGeom prst="rect">
+            <a:avLst/>
+          </a:prstGeom>
+          <a:noFill/>
+        </p:spPr>
+        <p:txBody>
+          <a:bodyPr wrap="square" anchor="t" lIns="18288" rIns="18288" tIns="9144" bIns="9144">
+            <a:noAutofit/>
+          </a:bodyPr>
+          <a:lstStyle/>
+          <a:p>
+            <a:pPr algn="l">
+              <a:defRPr sz="2500" b="0">
+                <a:solidFill>
+                  <a:srgbClr val="183042"/>
+                </a:solidFill>
+                <a:latin typeface="Microsoft YaHei"/>
+              </a:defRPr>
+            </a:pPr>
+            <a:r>
+              <a:t>案例实践</a:t>
+            </a:r>
+          </a:p>
+        </p:txBody>
+      </p:sp>
+      <p:sp>
+        <p:nvSpPr>
+          <p:cNvPr id="14" name="Rectangle 13"/>
+          <p:cNvSpPr/>
+          <p:nvPr/>
+        </p:nvSpPr>
+        <p:spPr>
+          <a:xfrm>
+            <a:off x="1691640" y="3319272"/>
+            <a:ext cx="9098280" cy="10972"/>
+          </a:xfrm>
+          <a:prstGeom prst="rect">
+            <a:avLst/>
+          </a:prstGeom>
+          <a:solidFill>
+            <a:srgbClr val="627987"/>
+          </a:solidFill>
+          <a:ln>
+            <a:noFill/>
+          </a:ln>
+        </p:spPr>
+        <p:style>
+          <a:lnRef idx="1">
+            <a:schemeClr val="accent1"/>
+          </a:lnRef>
+          <a:fillRef idx="3">
+            <a:schemeClr val="accent1"/>
+          </a:fillRef>
+          <a:effectRef idx="2">
+            <a:schemeClr val="accent1"/>
+          </a:effectRef>
+          <a:fontRef idx="minor">
+            <a:schemeClr val="lt1"/>
+          </a:fontRef>
+        </p:style>
+        <p:txBody>
+          <a:bodyPr rtlCol="0" anchor="ctr"/>
+          <a:lstStyle/>
+          <a:p>
+            <a:pPr algn="ctr"/>
+          </a:p>
+        </p:txBody>
+      </p:sp>
+      <p:sp>
+        <p:nvSpPr>
+          <p:cNvPr id="15" name="TextBox 14"/>
+          <p:cNvSpPr txBox="1"/>
+          <p:nvPr/>
+        </p:nvSpPr>
+        <p:spPr>
+          <a:xfrm>
+            <a:off x="868680" y="3529584"/>
+            <a:ext cx="640080" cy="438912"/>
+          </a:xfrm>
+          <a:prstGeom prst="rect">
+            <a:avLst/>
+          </a:prstGeom>
+          <a:noFill/>
+        </p:spPr>
+        <p:txBody>
+          <a:bodyPr wrap="square" anchor="t" lIns="18288" rIns="18288" tIns="9144" bIns="9144">
+            <a:noAutofit/>
+          </a:bodyPr>
+          <a:lstStyle/>
+          <a:p>
+            <a:pPr algn="l">
+              <a:defRPr sz="1900" b="1">
+                <a:solidFill>
+                  <a:srgbClr val="E89B52"/>
+                </a:solidFill>
+                <a:latin typeface="Microsoft YaHei"/>
+              </a:defRPr>
+            </a:pPr>
+            <a:r>
+              <a:t>04</a:t>
+            </a:r>
+          </a:p>
+        </p:txBody>
+      </p:sp>
+      <p:sp>
+        <p:nvSpPr>
+          <p:cNvPr id="16" name="TextBox 15"/>
+          <p:cNvSpPr txBox="1"/>
+          <p:nvPr/>
+        </p:nvSpPr>
+        <p:spPr>
+          <a:xfrm>
+            <a:off x="1691640" y="3511296"/>
+            <a:ext cx="9372600" cy="530352"/>
+          </a:xfrm>
+          <a:prstGeom prst="rect">
+            <a:avLst/>
+          </a:prstGeom>
+          <a:noFill/>
+        </p:spPr>
+        <p:txBody>
+          <a:bodyPr wrap="square" anchor="t" lIns="18288" rIns="18288" tIns="9144" bIns="9144">
+            <a:noAutofit/>
+          </a:bodyPr>
+          <a:lstStyle/>
+          <a:p>
+            <a:pPr algn="l">
+              <a:defRPr sz="2500" b="0">
+                <a:solidFill>
+                  <a:srgbClr val="183042"/>
+                </a:solidFill>
+                <a:latin typeface="Microsoft YaHei"/>
+              </a:defRPr>
+            </a:pPr>
+            <a:r>
+              <a:t>总结提升</a:t>
+            </a:r>
+          </a:p>
+        </p:txBody>
+      </p:sp>
+      <p:sp>
+        <p:nvSpPr>
+          <p:cNvPr id="17" name="Rectangle 16"/>
+          <p:cNvSpPr/>
+          <p:nvPr/>
+        </p:nvSpPr>
+        <p:spPr>
+          <a:xfrm>
+            <a:off x="1691640" y="4023360"/>
+            <a:ext cx="9098280" cy="10972"/>
+          </a:xfrm>
+          <a:prstGeom prst="rect">
+            <a:avLst/>
+          </a:prstGeom>
+          <a:solidFill>
+            <a:srgbClr val="627987"/>
+          </a:solidFill>
+          <a:ln>
+            <a:noFill/>
+          </a:ln>
+        </p:spPr>
+        <p:style>
+          <a:lnRef idx="1">
+            <a:schemeClr val="accent1"/>
+          </a:lnRef>
+          <a:fillRef idx="3">
+            <a:schemeClr val="accent1"/>
+          </a:fillRef>
+          <a:effectRef idx="2">
+            <a:schemeClr val="accent1"/>
+          </a:effectRef>
+          <a:fontRef idx="minor">
+            <a:schemeClr val="lt1"/>
+          </a:fontRef>
+        </p:style>
+        <p:txBody>
+          <a:bodyPr rtlCol="0" anchor="ctr"/>
+          <a:lstStyle/>
+          <a:p>
+            <a:pPr algn="ctr"/>
+          </a:p>
+        </p:txBody>
+      </p:sp>
+    </p:spTree>
+  </p:cSld>
+  <p:clrMapOvr>
+    <a:masterClrMapping/>
+  </p:clrMapOvr>
+</p:sld>
+</file>
+
+<file path=ppt/slides/slide3.xml><?xml version="1.0" encoding="utf-8"?>
+<p:sld xmlns:a="http://schemas.openxmlformats.org/drawingml/2006/main" xmlns:p="http://schemas.openxmlformats.org/presentationml/2006/main" xmlns:r="http://schemas.openxmlformats.org/officeDocument/2006/relationships">
+  <p:cSld>
+    <p:bg>
+      <p:bgPr>
+        <a:solidFill>
+          <a:srgbClr val="F5F8FA"/>
+        </a:solidFill>
+        <a:effectLst/>
+      </p:bgPr>
+    </p:bg>
+    <p:spTree>
+      <p:nvGrpSpPr>
+        <p:cNvPr id="1" name=""/>
+        <p:cNvGrpSpPr/>
+        <p:nvPr/>
+      </p:nvGrpSpPr>
+      <p:grpSpPr/>
+      <p:sp>
+        <p:nvSpPr>
+          <p:cNvPr id="2" name="TextBox 1"/>
+          <p:cNvSpPr txBox="1"/>
+          <p:nvPr/>
+        </p:nvSpPr>
+        <p:spPr>
+          <a:xfrm>
+            <a:off x="11292840" y="6446520"/>
+            <a:ext cx="411480" cy="201168"/>
+          </a:xfrm>
+          <a:prstGeom prst="rect">
+            <a:avLst/>
+          </a:prstGeom>
+          <a:noFill/>
+        </p:spPr>
+        <p:txBody>
+          <a:bodyPr wrap="square" anchor="t" lIns="18288" rIns="18288" tIns="9144" bIns="9144">
+            <a:noAutofit/>
+          </a:bodyPr>
+          <a:lstStyle/>
+          <a:p>
+            <a:pPr algn="r">
+              <a:defRPr sz="900" b="0">
+                <a:solidFill>
+                  <a:srgbClr val="627987"/>
+                </a:solidFill>
+                <a:latin typeface="Microsoft YaHei"/>
+              </a:defRPr>
+            </a:pPr>
+            <a:r>
+              <a:t>3</a:t>
+            </a:r>
+          </a:p>
+        </p:txBody>
+      </p:sp>
+      <p:sp>
+        <p:nvSpPr>
+          <p:cNvPr id="3" name="TextBox 2"/>
+          <p:cNvSpPr txBox="1"/>
+          <p:nvPr/>
+        </p:nvSpPr>
+        <p:spPr>
+          <a:xfrm>
+            <a:off x="685800" y="365760"/>
+            <a:ext cx="2011680" cy="219456"/>
+          </a:xfrm>
+          <a:prstGeom prst="rect">
+            <a:avLst/>
+          </a:prstGeom>
+          <a:noFill/>
+        </p:spPr>
+        <p:txBody>
+          <a:bodyPr wrap="square" anchor="t" lIns="18288" rIns="18288" tIns="9144" bIns="9144">
+            <a:noAutofit/>
+          </a:bodyPr>
+          <a:lstStyle/>
+          <a:p>
+            <a:pPr algn="l">
+              <a:defRPr sz="1000" b="1">
+                <a:solidFill>
+                  <a:srgbClr val="E89B52"/>
+                </a:solidFill>
+                <a:latin typeface="Microsoft YaHei"/>
+              </a:defRPr>
+            </a:pPr>
+            <a:r>
+              <a:t>CONTENT</a:t>
+            </a:r>
+          </a:p>
+        </p:txBody>
+      </p:sp>
+      <p:sp>
+        <p:nvSpPr>
+          <p:cNvPr id="4" name="TextBox 3"/>
+          <p:cNvSpPr txBox="1"/>
+          <p:nvPr/>
+        </p:nvSpPr>
+        <p:spPr>
+          <a:xfrm>
+            <a:off x="658368" y="640080"/>
+            <a:ext cx="10744200" cy="512064"/>
+          </a:xfrm>
+          <a:prstGeom prst="rect">
+            <a:avLst/>
+          </a:prstGeom>
+          <a:noFill/>
+        </p:spPr>
+        <p:txBody>
+          <a:bodyPr wrap="square" anchor="t" lIns="18288" rIns="18288" tIns="9144" bIns="9144">
+            <a:noAutofit/>
+          </a:bodyPr>
+          <a:lstStyle/>
+          <a:p>
+            <a:pPr algn="l">
+              <a:defRPr sz="3400" b="1">
+                <a:solidFill>
+                  <a:srgbClr val="183042"/>
+                </a:solidFill>
+                <a:latin typeface="Microsoft YaHei"/>
+              </a:defRPr>
+            </a:pPr>
+            <a:r>
+              <a:t>核心内容</a:t>
+            </a:r>
+          </a:p>
+        </p:txBody>
+      </p:sp>
+      <p:sp>
+        <p:nvSpPr>
+          <p:cNvPr id="5" name="Rectangle 4"/>
+          <p:cNvSpPr/>
+          <p:nvPr/>
+        </p:nvSpPr>
+        <p:spPr>
+          <a:xfrm>
+            <a:off x="658368" y="1161288"/>
+            <a:ext cx="10863072" cy="18288"/>
+          </a:xfrm>
+          <a:prstGeom prst="rect">
+            <a:avLst/>
+          </a:prstGeom>
+          <a:solidFill>
+            <a:srgbClr val="2F7E83"/>
+          </a:solidFill>
+          <a:ln>
+            <a:noFill/>
+          </a:ln>
+        </p:spPr>
+        <p:style>
+          <a:lnRef idx="1">
+            <a:schemeClr val="accent1"/>
+          </a:lnRef>
+          <a:fillRef idx="3">
+            <a:schemeClr val="accent1"/>
+          </a:fillRef>
+          <a:effectRef idx="2">
+            <a:schemeClr val="accent1"/>
+          </a:effectRef>
+          <a:fontRef idx="minor">
+            <a:schemeClr val="lt1"/>
+          </a:fontRef>
+        </p:style>
+        <p:txBody>
+          <a:bodyPr rtlCol="0" anchor="ctr"/>
+          <a:lstStyle/>
+          <a:p>
+            <a:pPr algn="ctr"/>
+          </a:p>
+        </p:txBody>
+      </p:sp>
+      <p:sp>
+        <p:nvSpPr>
+          <p:cNvPr id="6" name="Rounded Rectangle 5"/>
+          <p:cNvSpPr/>
+          <p:nvPr/>
+        </p:nvSpPr>
+        <p:spPr>
+          <a:xfrm>
+            <a:off x="658368" y="1298448"/>
+            <a:ext cx="5358384" cy="4892040"/>
+          </a:xfrm>
+          <a:prstGeom prst="roundRect">
+            <a:avLst/>
+          </a:prstGeom>
+          <a:solidFill>
+            <a:srgbClr val="FFFFFF"/>
+          </a:solidFill>
+          <a:ln>
+            <a:solidFill>
+              <a:srgbClr val="627987"/>
+            </a:solidFill>
+          </a:ln>
+        </p:spPr>
+        <p:style>
+          <a:lnRef idx="1">
+            <a:schemeClr val="accent1"/>
+          </a:lnRef>
+          <a:fillRef idx="3">
+            <a:schemeClr val="accent1"/>
+          </a:fillRef>
+          <a:effectRef idx="2">
+            <a:schemeClr val="accent1"/>
+          </a:effectRef>
+          <a:fontRef idx="minor">
+            <a:schemeClr val="lt1"/>
+          </a:fontRef>
+        </p:style>
+        <p:txBody>
+          <a:bodyPr rtlCol="0" anchor="ctr"/>
+          <a:lstStyle/>
+          <a:p>
+            <a:pPr algn="ctr"/>
+          </a:p>
+        </p:txBody>
+      </p:sp>
+      <p:sp>
+        <p:nvSpPr>
+          <p:cNvPr id="7" name="TextBox 6"/>
+          <p:cNvSpPr txBox="1"/>
+          <p:nvPr/>
+        </p:nvSpPr>
+        <p:spPr>
+          <a:xfrm>
+            <a:off x="914400" y="1463039"/>
+            <a:ext cx="4846320" cy="329184"/>
+          </a:xfrm>
+          <a:prstGeom prst="rect">
+            <a:avLst/>
+          </a:prstGeom>
+          <a:noFill/>
+        </p:spPr>
+        <p:txBody>
+          <a:bodyPr wrap="square" anchor="t" lIns="18288" rIns="18288" tIns="9144" bIns="9144">
+            <a:noAutofit/>
+          </a:bodyPr>
+          <a:lstStyle/>
+          <a:p>
+            <a:pPr algn="l">
+              <a:defRPr sz="1500" b="1">
+                <a:solidFill>
+                  <a:srgbClr val="2F7E83"/>
+                </a:solidFill>
+                <a:latin typeface="Microsoft YaHei"/>
+              </a:defRPr>
+            </a:pPr>
+            <a:r>
+              <a:t>教学内容</a:t>
+            </a:r>
+          </a:p>
+        </p:txBody>
+      </p:sp>
+      <p:sp>
+        <p:nvSpPr>
+          <p:cNvPr id="8" name="TextBox 7"/>
+          <p:cNvSpPr txBox="1"/>
+          <p:nvPr/>
+        </p:nvSpPr>
+        <p:spPr>
+          <a:xfrm>
+            <a:off x="905256" y="1920240"/>
+            <a:ext cx="4864608" cy="4069079"/>
+          </a:xfrm>
+          <a:prstGeom prst="rect">
+            <a:avLst/>
+          </a:prstGeom>
+          <a:noFill/>
+        </p:spPr>
+        <p:txBody>
+          <a:bodyPr wrap="square" lIns="27432" rIns="27432" tIns="18288" bIns="18288">
+            <a:noAutofit/>
           </a:bodyPr>
           <a:lstStyle/>
           <a:p>
             <a:pPr>
               <a:lnSpc>
-                <a:spcPts val="2800"/>
+                <a:spcPct val="113000"/>
               </a:lnSpc>
+              <a:spcAft>
+                <a:spcPts val="700"/>
+              </a:spcAft>
               <a:defRPr sz="1800">
                 <a:solidFill>
-                  <a:srgbClr val="333333"/>
+                  <a:srgbClr val="183042"/>
                 </a:solidFill>
+                <a:latin typeface="Microsoft YaHei"/>
               </a:defRPr>
             </a:pPr>
             <a:r>
-              <a:t>本节课我们将学习核心概念，了解其在实际中的应用场景。</a:t>
+              <a:t>正文｜在这里填写本页的关键概念、方法或案例。</a:t>
+            </a:r>
+          </a:p>
+          <a:p>
+            <a:pPr>
+              <a:lnSpc>
+                <a:spcPct val="113000"/>
+              </a:lnSpc>
+              <a:spcAft>
+                <a:spcPts val="700"/>
+              </a:spcAft>
+              <a:defRPr sz="1800">
+                <a:solidFill>
+                  <a:srgbClr val="183042"/>
+                </a:solidFill>
+                <a:latin typeface="Microsoft YaHei"/>
+              </a:defRPr>
+            </a:pPr>
+            <a:r>
+              <a:t>• 要点｜教学要点一</a:t>
+            </a:r>
+          </a:p>
+          <a:p>
+            <a:pPr>
+              <a:lnSpc>
+                <a:spcPct val="113000"/>
+              </a:lnSpc>
+              <a:spcAft>
+                <a:spcPts val="700"/>
+              </a:spcAft>
+              <a:defRPr sz="1800">
+                <a:solidFill>
+                  <a:srgbClr val="183042"/>
+                </a:solidFill>
+                <a:latin typeface="Microsoft YaHei"/>
+              </a:defRPr>
+            </a:pPr>
+            <a:r>
+              <a:t>• 要点｜教学要点二</a:t>
+            </a:r>
+          </a:p>
+        </p:txBody>
+      </p:sp>
+      <p:sp>
+        <p:nvSpPr>
+          <p:cNvPr id="9" name="Rounded Rectangle 8"/>
+          <p:cNvSpPr/>
+          <p:nvPr/>
+        </p:nvSpPr>
+        <p:spPr>
+          <a:xfrm>
+            <a:off x="6199632" y="1298448"/>
+            <a:ext cx="5321808" cy="4892040"/>
+          </a:xfrm>
+          <a:prstGeom prst="roundRect">
+            <a:avLst/>
+          </a:prstGeom>
+          <a:solidFill>
+            <a:srgbClr val="FFFFFF"/>
+          </a:solidFill>
+          <a:ln>
+            <a:solidFill>
+              <a:srgbClr val="627987"/>
+            </a:solidFill>
+          </a:ln>
+        </p:spPr>
+        <p:style>
+          <a:lnRef idx="1">
+            <a:schemeClr val="accent1"/>
+          </a:lnRef>
+          <a:fillRef idx="3">
+            <a:schemeClr val="accent1"/>
+          </a:fillRef>
+          <a:effectRef idx="2">
+            <a:schemeClr val="accent1"/>
+          </a:effectRef>
+          <a:fontRef idx="minor">
+            <a:schemeClr val="lt1"/>
+          </a:fontRef>
+        </p:style>
+        <p:txBody>
+          <a:bodyPr rtlCol="0" anchor="ctr"/>
+          <a:lstStyle/>
+          <a:p>
+            <a:pPr algn="ctr"/>
+          </a:p>
+        </p:txBody>
+      </p:sp>
+      <p:sp>
+        <p:nvSpPr>
+          <p:cNvPr id="10" name="TextBox 9"/>
+          <p:cNvSpPr txBox="1"/>
+          <p:nvPr/>
+        </p:nvSpPr>
+        <p:spPr>
+          <a:xfrm>
+            <a:off x="6455664" y="1463039"/>
+            <a:ext cx="4809744" cy="329184"/>
+          </a:xfrm>
+          <a:prstGeom prst="rect">
+            <a:avLst/>
+          </a:prstGeom>
+          <a:noFill/>
+        </p:spPr>
+        <p:txBody>
+          <a:bodyPr wrap="square" anchor="t" lIns="18288" rIns="18288" tIns="9144" bIns="9144">
+            <a:noAutofit/>
+          </a:bodyPr>
+          <a:lstStyle/>
+          <a:p>
+            <a:pPr algn="l">
+              <a:defRPr sz="1500" b="1">
+                <a:solidFill>
+                  <a:srgbClr val="2F7E83"/>
+                </a:solidFill>
+                <a:latin typeface="Microsoft YaHei"/>
+              </a:defRPr>
+            </a:pPr>
+            <a:r>
+              <a:t>讲授分段</a:t>
+            </a:r>
+          </a:p>
+        </p:txBody>
+      </p:sp>
+      <p:sp>
+        <p:nvSpPr>
+          <p:cNvPr id="11" name="TextBox 10"/>
+          <p:cNvSpPr txBox="1"/>
+          <p:nvPr/>
+        </p:nvSpPr>
+        <p:spPr>
+          <a:xfrm>
+            <a:off x="6446520" y="1920240"/>
+            <a:ext cx="4828032" cy="4069079"/>
+          </a:xfrm>
+          <a:prstGeom prst="rect">
+            <a:avLst/>
+          </a:prstGeom>
+          <a:noFill/>
+        </p:spPr>
+        <p:txBody>
+          <a:bodyPr wrap="square" lIns="27432" rIns="27432" tIns="18288" bIns="18288">
+            <a:noAutofit/>
+          </a:bodyPr>
+          <a:lstStyle/>
+          <a:p>
+            <a:pPr>
+              <a:lnSpc>
+                <a:spcPct val="113000"/>
+              </a:lnSpc>
+              <a:spcAft>
+                <a:spcPts val="700"/>
+              </a:spcAft>
+              <a:defRPr sz="1800">
+                <a:solidFill>
+                  <a:srgbClr val="183042"/>
+                </a:solidFill>
+                <a:latin typeface="Microsoft YaHei"/>
+              </a:defRPr>
+            </a:pPr>
+            <a:r>
+              <a:t>导入 · 30秒｜用问题或场景引入本页。</a:t>
+            </a:r>
+          </a:p>
+          <a:p>
+            <a:pPr>
+              <a:lnSpc>
+                <a:spcPct val="113000"/>
+              </a:lnSpc>
+              <a:spcAft>
+                <a:spcPts val="700"/>
+              </a:spcAft>
+              <a:defRPr sz="1800">
+                <a:solidFill>
+                  <a:srgbClr val="183042"/>
+                </a:solidFill>
+                <a:latin typeface="Microsoft YaHei"/>
+              </a:defRPr>
+            </a:pPr>
+            <a:r>
+              <a:t>讲解 · 1分30秒｜讲清概念，并连接学生已有知识。</a:t>
+            </a:r>
+          </a:p>
+          <a:p>
+            <a:pPr>
+              <a:lnSpc>
+                <a:spcPct val="113000"/>
+              </a:lnSpc>
+              <a:spcAft>
+                <a:spcPts val="700"/>
+              </a:spcAft>
+              <a:defRPr sz="1800">
+                <a:solidFill>
+                  <a:srgbClr val="183042"/>
+                </a:solidFill>
+                <a:latin typeface="Microsoft YaHei"/>
+              </a:defRPr>
+            </a:pPr>
+            <a:r>
+              <a:t>互动 · 45秒｜设置一个可现场回应的问题。</a:t>
+            </a:r>
+          </a:p>
+        </p:txBody>
+      </p:sp>
+    </p:spTree>
+  </p:cSld>
+  <p:clrMapOvr>
+    <a:masterClrMapping/>
+  </p:clrMapOvr>
+</p:sld>
+</file>
+
+<file path=ppt/slides/slide4.xml><?xml version="1.0" encoding="utf-8"?>
+<p:sld xmlns:a="http://schemas.openxmlformats.org/drawingml/2006/main" xmlns:p="http://schemas.openxmlformats.org/presentationml/2006/main" xmlns:r="http://schemas.openxmlformats.org/officeDocument/2006/relationships">
+  <p:cSld>
+    <p:bg>
+      <p:bgPr>
+        <a:solidFill>
+          <a:srgbClr val="F5F8FA"/>
+        </a:solidFill>
+        <a:effectLst/>
+      </p:bgPr>
+    </p:bg>
+    <p:spTree>
+      <p:nvGrpSpPr>
+        <p:cNvPr id="1" name=""/>
+        <p:cNvGrpSpPr/>
+        <p:nvPr/>
+      </p:nvGrpSpPr>
+      <p:grpSpPr/>
+      <p:sp>
+        <p:nvSpPr>
+          <p:cNvPr id="2" name="TextBox 1"/>
+          <p:cNvSpPr txBox="1"/>
+          <p:nvPr/>
+        </p:nvSpPr>
+        <p:spPr>
+          <a:xfrm>
+            <a:off x="11292840" y="6446520"/>
+            <a:ext cx="411480" cy="201168"/>
+          </a:xfrm>
+          <a:prstGeom prst="rect">
+            <a:avLst/>
+          </a:prstGeom>
+          <a:noFill/>
+        </p:spPr>
+        <p:txBody>
+          <a:bodyPr wrap="square" anchor="t" lIns="18288" rIns="18288" tIns="9144" bIns="9144">
+            <a:noAutofit/>
+          </a:bodyPr>
+          <a:lstStyle/>
+          <a:p>
+            <a:pPr algn="r">
+              <a:defRPr sz="900" b="0">
+                <a:solidFill>
+                  <a:srgbClr val="627987"/>
+                </a:solidFill>
+                <a:latin typeface="Microsoft YaHei"/>
+              </a:defRPr>
+            </a:pPr>
+            <a:r>
+              <a:t>4</a:t>
+            </a:r>
+          </a:p>
+        </p:txBody>
+      </p:sp>
+      <p:sp>
+        <p:nvSpPr>
+          <p:cNvPr id="3" name="TextBox 2"/>
+          <p:cNvSpPr txBox="1"/>
+          <p:nvPr/>
+        </p:nvSpPr>
+        <p:spPr>
+          <a:xfrm>
+            <a:off x="685800" y="365760"/>
+            <a:ext cx="2011680" cy="219456"/>
+          </a:xfrm>
+          <a:prstGeom prst="rect">
+            <a:avLst/>
+          </a:prstGeom>
+          <a:noFill/>
+        </p:spPr>
+        <p:txBody>
+          <a:bodyPr wrap="square" anchor="t" lIns="18288" rIns="18288" tIns="9144" bIns="9144">
+            <a:noAutofit/>
+          </a:bodyPr>
+          <a:lstStyle/>
+          <a:p>
+            <a:pPr algn="l">
+              <a:defRPr sz="1000" b="1">
+                <a:solidFill>
+                  <a:srgbClr val="E89B52"/>
+                </a:solidFill>
+                <a:latin typeface="Microsoft YaHei"/>
+              </a:defRPr>
+            </a:pPr>
+            <a:r>
+              <a:t>SUMMARY</a:t>
+            </a:r>
+          </a:p>
+        </p:txBody>
+      </p:sp>
+      <p:sp>
+        <p:nvSpPr>
+          <p:cNvPr id="4" name="TextBox 3"/>
+          <p:cNvSpPr txBox="1"/>
+          <p:nvPr/>
+        </p:nvSpPr>
+        <p:spPr>
+          <a:xfrm>
+            <a:off x="658368" y="640080"/>
+            <a:ext cx="10744200" cy="512064"/>
+          </a:xfrm>
+          <a:prstGeom prst="rect">
+            <a:avLst/>
+          </a:prstGeom>
+          <a:noFill/>
+        </p:spPr>
+        <p:txBody>
+          <a:bodyPr wrap="square" anchor="t" lIns="18288" rIns="18288" tIns="9144" bIns="9144">
+            <a:noAutofit/>
+          </a:bodyPr>
+          <a:lstStyle/>
+          <a:p>
+            <a:pPr algn="l">
+              <a:defRPr sz="3400" b="1">
+                <a:solidFill>
+                  <a:srgbClr val="183042"/>
+                </a:solidFill>
+                <a:latin typeface="Microsoft YaHei"/>
+              </a:defRPr>
+            </a:pPr>
+            <a:r>
+              <a:t>本节小结</a:t>
+            </a:r>
+          </a:p>
+        </p:txBody>
+      </p:sp>
+      <p:sp>
+        <p:nvSpPr>
+          <p:cNvPr id="5" name="Rectangle 4"/>
+          <p:cNvSpPr/>
+          <p:nvPr/>
+        </p:nvSpPr>
+        <p:spPr>
+          <a:xfrm>
+            <a:off x="658368" y="1161288"/>
+            <a:ext cx="10863072" cy="18288"/>
+          </a:xfrm>
+          <a:prstGeom prst="rect">
+            <a:avLst/>
+          </a:prstGeom>
+          <a:solidFill>
+            <a:srgbClr val="2F7E83"/>
+          </a:solidFill>
+          <a:ln>
+            <a:noFill/>
+          </a:ln>
+        </p:spPr>
+        <p:style>
+          <a:lnRef idx="1">
+            <a:schemeClr val="accent1"/>
+          </a:lnRef>
+          <a:fillRef idx="3">
+            <a:schemeClr val="accent1"/>
+          </a:fillRef>
+          <a:effectRef idx="2">
+            <a:schemeClr val="accent1"/>
+          </a:effectRef>
+          <a:fontRef idx="minor">
+            <a:schemeClr val="lt1"/>
+          </a:fontRef>
+        </p:style>
+        <p:txBody>
+          <a:bodyPr rtlCol="0" anchor="ctr"/>
+          <a:lstStyle/>
+          <a:p>
+            <a:pPr algn="ctr"/>
+          </a:p>
+        </p:txBody>
+      </p:sp>
+      <p:sp>
+        <p:nvSpPr>
+          <p:cNvPr id="6" name="Rectangle 5"/>
+          <p:cNvSpPr/>
+          <p:nvPr/>
+        </p:nvSpPr>
+        <p:spPr>
+          <a:xfrm>
+            <a:off x="658368" y="1353312"/>
+            <a:ext cx="82296" cy="4709160"/>
+          </a:xfrm>
+          <a:prstGeom prst="rect">
+            <a:avLst/>
+          </a:prstGeom>
+          <a:solidFill>
+            <a:srgbClr val="E89B52"/>
+          </a:solidFill>
+          <a:ln>
+            <a:noFill/>
+          </a:ln>
+        </p:spPr>
+        <p:style>
+          <a:lnRef idx="1">
+            <a:schemeClr val="accent1"/>
+          </a:lnRef>
+          <a:fillRef idx="3">
+            <a:schemeClr val="accent1"/>
+          </a:fillRef>
+          <a:effectRef idx="2">
+            <a:schemeClr val="accent1"/>
+          </a:effectRef>
+          <a:fontRef idx="minor">
+            <a:schemeClr val="lt1"/>
+          </a:fontRef>
+        </p:style>
+        <p:txBody>
+          <a:bodyPr rtlCol="0" anchor="ctr"/>
+          <a:lstStyle/>
+          <a:p>
+            <a:pPr algn="ctr"/>
+          </a:p>
+        </p:txBody>
+      </p:sp>
+      <p:sp>
+        <p:nvSpPr>
+          <p:cNvPr id="7" name="Oval 6"/>
+          <p:cNvSpPr/>
+          <p:nvPr/>
+        </p:nvSpPr>
+        <p:spPr>
+          <a:xfrm>
+            <a:off x="987552" y="1600200"/>
+            <a:ext cx="164592" cy="164592"/>
+          </a:xfrm>
+          <a:prstGeom prst="ellipse">
+            <a:avLst/>
+          </a:prstGeom>
+          <a:solidFill>
+            <a:srgbClr val="2F7E83"/>
+          </a:solidFill>
+          <a:ln>
+            <a:noFill/>
+          </a:ln>
+        </p:spPr>
+        <p:style>
+          <a:lnRef idx="1">
+            <a:schemeClr val="accent1"/>
+          </a:lnRef>
+          <a:fillRef idx="3">
+            <a:schemeClr val="accent1"/>
+          </a:fillRef>
+          <a:effectRef idx="2">
+            <a:schemeClr val="accent1"/>
+          </a:effectRef>
+          <a:fontRef idx="minor">
+            <a:schemeClr val="lt1"/>
+          </a:fontRef>
+        </p:style>
+        <p:txBody>
+          <a:bodyPr rtlCol="0" anchor="ctr"/>
+          <a:lstStyle/>
+          <a:p>
+            <a:pPr algn="ctr"/>
+          </a:p>
+        </p:txBody>
+      </p:sp>
+      <p:sp>
+        <p:nvSpPr>
+          <p:cNvPr id="8" name="TextBox 7"/>
+          <p:cNvSpPr txBox="1"/>
+          <p:nvPr/>
+        </p:nvSpPr>
+        <p:spPr>
+          <a:xfrm>
+            <a:off x="1389888" y="1481328"/>
+            <a:ext cx="9555480" cy="612648"/>
+          </a:xfrm>
+          <a:prstGeom prst="rect">
+            <a:avLst/>
+          </a:prstGeom>
+          <a:noFill/>
+        </p:spPr>
+        <p:txBody>
+          <a:bodyPr wrap="square" anchor="t" lIns="18288" rIns="18288" tIns="9144" bIns="9144">
+            <a:noAutofit/>
+          </a:bodyPr>
+          <a:lstStyle/>
+          <a:p>
+            <a:pPr algn="l">
+              <a:defRPr sz="2500" b="0">
+                <a:solidFill>
+                  <a:srgbClr val="183042"/>
+                </a:solidFill>
+                <a:latin typeface="Microsoft YaHei"/>
+              </a:defRPr>
+            </a:pPr>
+            <a:r>
+              <a:t>回顾核心结论</a:t>
+            </a:r>
+          </a:p>
+        </p:txBody>
+      </p:sp>
+      <p:sp>
+        <p:nvSpPr>
+          <p:cNvPr id="9" name="Oval 8"/>
+          <p:cNvSpPr/>
+          <p:nvPr/>
+        </p:nvSpPr>
+        <p:spPr>
+          <a:xfrm>
+            <a:off x="987552" y="2313432"/>
+            <a:ext cx="164592" cy="164592"/>
+          </a:xfrm>
+          <a:prstGeom prst="ellipse">
+            <a:avLst/>
+          </a:prstGeom>
+          <a:solidFill>
+            <a:srgbClr val="2F7E83"/>
+          </a:solidFill>
+          <a:ln>
+            <a:noFill/>
+          </a:ln>
+        </p:spPr>
+        <p:style>
+          <a:lnRef idx="1">
+            <a:schemeClr val="accent1"/>
+          </a:lnRef>
+          <a:fillRef idx="3">
+            <a:schemeClr val="accent1"/>
+          </a:fillRef>
+          <a:effectRef idx="2">
+            <a:schemeClr val="accent1"/>
+          </a:effectRef>
+          <a:fontRef idx="minor">
+            <a:schemeClr val="lt1"/>
+          </a:fontRef>
+        </p:style>
+        <p:txBody>
+          <a:bodyPr rtlCol="0" anchor="ctr"/>
+          <a:lstStyle/>
+          <a:p>
+            <a:pPr algn="ctr"/>
+          </a:p>
+        </p:txBody>
+      </p:sp>
+      <p:sp>
+        <p:nvSpPr>
+          <p:cNvPr id="10" name="TextBox 9"/>
+          <p:cNvSpPr txBox="1"/>
+          <p:nvPr/>
+        </p:nvSpPr>
+        <p:spPr>
+          <a:xfrm>
+            <a:off x="1389888" y="2194560"/>
+            <a:ext cx="9555480" cy="612648"/>
+          </a:xfrm>
+          <a:prstGeom prst="rect">
+            <a:avLst/>
+          </a:prstGeom>
+          <a:noFill/>
+        </p:spPr>
+        <p:txBody>
+          <a:bodyPr wrap="square" anchor="t" lIns="18288" rIns="18288" tIns="9144" bIns="9144">
+            <a:noAutofit/>
+          </a:bodyPr>
+          <a:lstStyle/>
+          <a:p>
+            <a:pPr algn="l">
+              <a:defRPr sz="2500" b="0">
+                <a:solidFill>
+                  <a:srgbClr val="183042"/>
+                </a:solidFill>
+                <a:latin typeface="Microsoft YaHei"/>
+              </a:defRPr>
+            </a:pPr>
+            <a:r>
+              <a:t>检查学习目标</a:t>
+            </a:r>
+          </a:p>
+        </p:txBody>
+      </p:sp>
+      <p:sp>
+        <p:nvSpPr>
+          <p:cNvPr id="11" name="Oval 10"/>
+          <p:cNvSpPr/>
+          <p:nvPr/>
+        </p:nvSpPr>
+        <p:spPr>
+          <a:xfrm>
+            <a:off x="987552" y="3026664"/>
+            <a:ext cx="164592" cy="164592"/>
+          </a:xfrm>
+          <a:prstGeom prst="ellipse">
+            <a:avLst/>
+          </a:prstGeom>
+          <a:solidFill>
+            <a:srgbClr val="2F7E83"/>
+          </a:solidFill>
+          <a:ln>
+            <a:noFill/>
+          </a:ln>
+        </p:spPr>
+        <p:style>
+          <a:lnRef idx="1">
+            <a:schemeClr val="accent1"/>
+          </a:lnRef>
+          <a:fillRef idx="3">
+            <a:schemeClr val="accent1"/>
+          </a:fillRef>
+          <a:effectRef idx="2">
+            <a:schemeClr val="accent1"/>
+          </a:effectRef>
+          <a:fontRef idx="minor">
+            <a:schemeClr val="lt1"/>
+          </a:fontRef>
+        </p:style>
+        <p:txBody>
+          <a:bodyPr rtlCol="0" anchor="ctr"/>
+          <a:lstStyle/>
+          <a:p>
+            <a:pPr algn="ctr"/>
+          </a:p>
+        </p:txBody>
+      </p:sp>
+      <p:sp>
+        <p:nvSpPr>
+          <p:cNvPr id="12" name="TextBox 11"/>
+          <p:cNvSpPr txBox="1"/>
+          <p:nvPr/>
+        </p:nvSpPr>
+        <p:spPr>
+          <a:xfrm>
+            <a:off x="1389888" y="2907792"/>
+            <a:ext cx="9555480" cy="612648"/>
+          </a:xfrm>
+          <a:prstGeom prst="rect">
+            <a:avLst/>
+          </a:prstGeom>
+          <a:noFill/>
+        </p:spPr>
+        <p:txBody>
+          <a:bodyPr wrap="square" anchor="t" lIns="18288" rIns="18288" tIns="9144" bIns="9144">
+            <a:noAutofit/>
+          </a:bodyPr>
+          <a:lstStyle/>
+          <a:p>
+            <a:pPr algn="l">
+              <a:defRPr sz="2500" b="0">
+                <a:solidFill>
+                  <a:srgbClr val="183042"/>
+                </a:solidFill>
+                <a:latin typeface="Microsoft YaHei"/>
+              </a:defRPr>
+            </a:pPr>
+            <a:r>
+              <a:t>说明课后应用</a:t>
             </a:r>
           </a:p>
         </p:txBody>

--- a/ai_engine/gen/templates/default.pptx
+++ b/ai_engine/gen/templates/default.pptx
@@ -9,6 +9,7 @@
     <p:sldId id="257" r:id="rId8"/>
     <p:sldId id="258" r:id="rId9"/>
     <p:sldId id="259" r:id="rId10"/>
+    <p:sldId id="260" r:id="rId11"/>
   </p:sldIdLst>
   <p:sldSz cx="12191999" cy="6858000" type="screen4x3"/>
   <p:notesSz cx="6858000" cy="9144000"/>
@@ -4487,6 +4488,467 @@
             </a:pPr>
             <a:r>
               <a:t>4</a:t>
+            </a:r>
+          </a:p>
+        </p:txBody>
+      </p:sp>
+      <p:sp>
+        <p:nvSpPr>
+          <p:cNvPr id="3" name="TextBox 2"/>
+          <p:cNvSpPr txBox="1"/>
+          <p:nvPr/>
+        </p:nvSpPr>
+        <p:spPr>
+          <a:xfrm>
+            <a:off x="685800" y="365760"/>
+            <a:ext cx="2011680" cy="219456"/>
+          </a:xfrm>
+          <a:prstGeom prst="rect">
+            <a:avLst/>
+          </a:prstGeom>
+          <a:noFill/>
+        </p:spPr>
+        <p:txBody>
+          <a:bodyPr wrap="square" anchor="t" lIns="18288" rIns="18288" tIns="9144" bIns="9144">
+            <a:noAutofit/>
+          </a:bodyPr>
+          <a:lstStyle/>
+          <a:p>
+            <a:pPr algn="l">
+              <a:defRPr sz="1000" b="1">
+                <a:solidFill>
+                  <a:srgbClr val="E89B52"/>
+                </a:solidFill>
+                <a:latin typeface="Microsoft YaHei"/>
+              </a:defRPr>
+            </a:pPr>
+            <a:r>
+              <a:t>TWO COLUMN</a:t>
+            </a:r>
+          </a:p>
+        </p:txBody>
+      </p:sp>
+      <p:sp>
+        <p:nvSpPr>
+          <p:cNvPr id="4" name="TextBox 3"/>
+          <p:cNvSpPr txBox="1"/>
+          <p:nvPr/>
+        </p:nvSpPr>
+        <p:spPr>
+          <a:xfrm>
+            <a:off x="658368" y="640080"/>
+            <a:ext cx="10744200" cy="512064"/>
+          </a:xfrm>
+          <a:prstGeom prst="rect">
+            <a:avLst/>
+          </a:prstGeom>
+          <a:noFill/>
+        </p:spPr>
+        <p:txBody>
+          <a:bodyPr wrap="square" anchor="t" lIns="18288" rIns="18288" tIns="9144" bIns="9144">
+            <a:noAutofit/>
+          </a:bodyPr>
+          <a:lstStyle/>
+          <a:p>
+            <a:pPr algn="l">
+              <a:defRPr sz="3400" b="1">
+                <a:solidFill>
+                  <a:srgbClr val="183042"/>
+                </a:solidFill>
+                <a:latin typeface="Microsoft YaHei"/>
+              </a:defRPr>
+            </a:pPr>
+            <a:r>
+              <a:t>双栏讲授</a:t>
+            </a:r>
+          </a:p>
+        </p:txBody>
+      </p:sp>
+      <p:sp>
+        <p:nvSpPr>
+          <p:cNvPr id="5" name="Rectangle 4"/>
+          <p:cNvSpPr/>
+          <p:nvPr/>
+        </p:nvSpPr>
+        <p:spPr>
+          <a:xfrm>
+            <a:off x="658368" y="1161288"/>
+            <a:ext cx="10863072" cy="18288"/>
+          </a:xfrm>
+          <a:prstGeom prst="rect">
+            <a:avLst/>
+          </a:prstGeom>
+          <a:solidFill>
+            <a:srgbClr val="2F7E83"/>
+          </a:solidFill>
+          <a:ln>
+            <a:noFill/>
+          </a:ln>
+        </p:spPr>
+        <p:style>
+          <a:lnRef idx="1">
+            <a:schemeClr val="accent1"/>
+          </a:lnRef>
+          <a:fillRef idx="3">
+            <a:schemeClr val="accent1"/>
+          </a:fillRef>
+          <a:effectRef idx="2">
+            <a:schemeClr val="accent1"/>
+          </a:effectRef>
+          <a:fontRef idx="minor">
+            <a:schemeClr val="lt1"/>
+          </a:fontRef>
+        </p:style>
+        <p:txBody>
+          <a:bodyPr rtlCol="0" anchor="ctr"/>
+          <a:lstStyle/>
+          <a:p>
+            <a:pPr algn="ctr"/>
+          </a:p>
+        </p:txBody>
+      </p:sp>
+      <p:sp>
+        <p:nvSpPr>
+          <p:cNvPr id="6" name="Rounded Rectangle 5"/>
+          <p:cNvSpPr/>
+          <p:nvPr/>
+        </p:nvSpPr>
+        <p:spPr>
+          <a:xfrm>
+            <a:off x="658368" y="1298448"/>
+            <a:ext cx="5102352" cy="4892040"/>
+          </a:xfrm>
+          <a:prstGeom prst="roundRect">
+            <a:avLst/>
+          </a:prstGeom>
+          <a:solidFill>
+            <a:srgbClr val="FFFFFF"/>
+          </a:solidFill>
+          <a:ln>
+            <a:solidFill>
+              <a:srgbClr val="627987"/>
+            </a:solidFill>
+          </a:ln>
+        </p:spPr>
+        <p:style>
+          <a:lnRef idx="1">
+            <a:schemeClr val="accent1"/>
+          </a:lnRef>
+          <a:fillRef idx="3">
+            <a:schemeClr val="accent1"/>
+          </a:fillRef>
+          <a:effectRef idx="2">
+            <a:schemeClr val="accent1"/>
+          </a:effectRef>
+          <a:fontRef idx="minor">
+            <a:schemeClr val="lt1"/>
+          </a:fontRef>
+        </p:style>
+        <p:txBody>
+          <a:bodyPr rtlCol="0" anchor="ctr"/>
+          <a:lstStyle/>
+          <a:p>
+            <a:pPr algn="ctr"/>
+          </a:p>
+        </p:txBody>
+      </p:sp>
+      <p:sp>
+        <p:nvSpPr>
+          <p:cNvPr id="7" name="TextBox 6"/>
+          <p:cNvSpPr txBox="1"/>
+          <p:nvPr/>
+        </p:nvSpPr>
+        <p:spPr>
+          <a:xfrm>
+            <a:off x="914400" y="1463039"/>
+            <a:ext cx="4590288" cy="329184"/>
+          </a:xfrm>
+          <a:prstGeom prst="rect">
+            <a:avLst/>
+          </a:prstGeom>
+          <a:noFill/>
+        </p:spPr>
+        <p:txBody>
+          <a:bodyPr wrap="square" anchor="t" lIns="18288" rIns="18288" tIns="9144" bIns="9144">
+            <a:noAutofit/>
+          </a:bodyPr>
+          <a:lstStyle/>
+          <a:p>
+            <a:pPr algn="l">
+              <a:defRPr sz="1500" b="1">
+                <a:solidFill>
+                  <a:srgbClr val="2F7E83"/>
+                </a:solidFill>
+                <a:latin typeface="Microsoft YaHei"/>
+              </a:defRPr>
+            </a:pPr>
+            <a:r>
+              <a:t>核心要点</a:t>
+            </a:r>
+          </a:p>
+        </p:txBody>
+      </p:sp>
+      <p:sp>
+        <p:nvSpPr>
+          <p:cNvPr id="8" name="TextBox 7"/>
+          <p:cNvSpPr txBox="1"/>
+          <p:nvPr/>
+        </p:nvSpPr>
+        <p:spPr>
+          <a:xfrm>
+            <a:off x="905256" y="1920240"/>
+            <a:ext cx="4608576" cy="4069079"/>
+          </a:xfrm>
+          <a:prstGeom prst="rect">
+            <a:avLst/>
+          </a:prstGeom>
+          <a:noFill/>
+        </p:spPr>
+        <p:txBody>
+          <a:bodyPr wrap="square" lIns="27432" rIns="27432" tIns="18288" bIns="18288">
+            <a:noAutofit/>
+          </a:bodyPr>
+          <a:lstStyle/>
+          <a:p>
+            <a:pPr>
+              <a:lnSpc>
+                <a:spcPct val="113000"/>
+              </a:lnSpc>
+              <a:spcAft>
+                <a:spcPts val="700"/>
+              </a:spcAft>
+              <a:defRPr sz="1800">
+                <a:solidFill>
+                  <a:srgbClr val="183042"/>
+                </a:solidFill>
+                <a:latin typeface="Microsoft YaHei"/>
+              </a:defRPr>
+            </a:pPr>
+            <a:r>
+              <a:t>• 要点｜左栏聚焦核心结论</a:t>
+            </a:r>
+          </a:p>
+          <a:p>
+            <a:pPr>
+              <a:lnSpc>
+                <a:spcPct val="113000"/>
+              </a:lnSpc>
+              <a:spcAft>
+                <a:spcPts val="700"/>
+              </a:spcAft>
+              <a:defRPr sz="1800">
+                <a:solidFill>
+                  <a:srgbClr val="183042"/>
+                </a:solidFill>
+                <a:latin typeface="Microsoft YaHei"/>
+              </a:defRPr>
+            </a:pPr>
+            <a:r>
+              <a:t>• 要点｜要点保持可快速扫描</a:t>
+            </a:r>
+          </a:p>
+        </p:txBody>
+      </p:sp>
+      <p:sp>
+        <p:nvSpPr>
+          <p:cNvPr id="9" name="Rounded Rectangle 8"/>
+          <p:cNvSpPr/>
+          <p:nvPr/>
+        </p:nvSpPr>
+        <p:spPr>
+          <a:xfrm>
+            <a:off x="6144768" y="1298448"/>
+            <a:ext cx="5376672" cy="4892040"/>
+          </a:xfrm>
+          <a:prstGeom prst="roundRect">
+            <a:avLst/>
+          </a:prstGeom>
+          <a:solidFill>
+            <a:srgbClr val="FFFFFF"/>
+          </a:solidFill>
+          <a:ln>
+            <a:solidFill>
+              <a:srgbClr val="627987"/>
+            </a:solidFill>
+          </a:ln>
+        </p:spPr>
+        <p:style>
+          <a:lnRef idx="1">
+            <a:schemeClr val="accent1"/>
+          </a:lnRef>
+          <a:fillRef idx="3">
+            <a:schemeClr val="accent1"/>
+          </a:fillRef>
+          <a:effectRef idx="2">
+            <a:schemeClr val="accent1"/>
+          </a:effectRef>
+          <a:fontRef idx="minor">
+            <a:schemeClr val="lt1"/>
+          </a:fontRef>
+        </p:style>
+        <p:txBody>
+          <a:bodyPr rtlCol="0" anchor="ctr"/>
+          <a:lstStyle/>
+          <a:p>
+            <a:pPr algn="ctr"/>
+          </a:p>
+        </p:txBody>
+      </p:sp>
+      <p:sp>
+        <p:nvSpPr>
+          <p:cNvPr id="10" name="TextBox 9"/>
+          <p:cNvSpPr txBox="1"/>
+          <p:nvPr/>
+        </p:nvSpPr>
+        <p:spPr>
+          <a:xfrm>
+            <a:off x="6400800" y="1463039"/>
+            <a:ext cx="4864608" cy="329184"/>
+          </a:xfrm>
+          <a:prstGeom prst="rect">
+            <a:avLst/>
+          </a:prstGeom>
+          <a:noFill/>
+        </p:spPr>
+        <p:txBody>
+          <a:bodyPr wrap="square" anchor="t" lIns="18288" rIns="18288" tIns="9144" bIns="9144">
+            <a:noAutofit/>
+          </a:bodyPr>
+          <a:lstStyle/>
+          <a:p>
+            <a:pPr algn="l">
+              <a:defRPr sz="1500" b="1">
+                <a:solidFill>
+                  <a:srgbClr val="2F7E83"/>
+                </a:solidFill>
+                <a:latin typeface="Microsoft YaHei"/>
+              </a:defRPr>
+            </a:pPr>
+            <a:r>
+              <a:t>讲授分段</a:t>
+            </a:r>
+          </a:p>
+        </p:txBody>
+      </p:sp>
+      <p:sp>
+        <p:nvSpPr>
+          <p:cNvPr id="11" name="TextBox 10"/>
+          <p:cNvSpPr txBox="1"/>
+          <p:nvPr/>
+        </p:nvSpPr>
+        <p:spPr>
+          <a:xfrm>
+            <a:off x="6391656" y="1920240"/>
+            <a:ext cx="4882896" cy="4069079"/>
+          </a:xfrm>
+          <a:prstGeom prst="rect">
+            <a:avLst/>
+          </a:prstGeom>
+          <a:noFill/>
+        </p:spPr>
+        <p:txBody>
+          <a:bodyPr wrap="square" lIns="27432" rIns="27432" tIns="18288" bIns="18288">
+            <a:noAutofit/>
+          </a:bodyPr>
+          <a:lstStyle/>
+          <a:p>
+            <a:pPr>
+              <a:lnSpc>
+                <a:spcPct val="113000"/>
+              </a:lnSpc>
+              <a:spcAft>
+                <a:spcPts val="700"/>
+              </a:spcAft>
+              <a:defRPr sz="1800">
+                <a:solidFill>
+                  <a:srgbClr val="183042"/>
+                </a:solidFill>
+                <a:latin typeface="Microsoft YaHei"/>
+              </a:defRPr>
+            </a:pPr>
+            <a:r>
+              <a:t>讲解 · 1分钟｜右栏呈现讲授分段与时长。</a:t>
+            </a:r>
+          </a:p>
+          <a:p>
+            <a:pPr>
+              <a:lnSpc>
+                <a:spcPct val="113000"/>
+              </a:lnSpc>
+              <a:spcAft>
+                <a:spcPts val="700"/>
+              </a:spcAft>
+              <a:defRPr sz="1800">
+                <a:solidFill>
+                  <a:srgbClr val="183042"/>
+                </a:solidFill>
+                <a:latin typeface="Microsoft YaHei"/>
+              </a:defRPr>
+            </a:pPr>
+            <a:r>
+              <a:t>互动 · 45秒｜以问题检验学生理解。</a:t>
+            </a:r>
+          </a:p>
+        </p:txBody>
+      </p:sp>
+    </p:spTree>
+  </p:cSld>
+  <p:clrMapOvr>
+    <a:masterClrMapping/>
+  </p:clrMapOvr>
+</p:sld>
+</file>
+
+<file path=ppt/slides/slide5.xml><?xml version="1.0" encoding="utf-8"?>
+<p:sld xmlns:a="http://schemas.openxmlformats.org/drawingml/2006/main" xmlns:p="http://schemas.openxmlformats.org/presentationml/2006/main" xmlns:r="http://schemas.openxmlformats.org/officeDocument/2006/relationships">
+  <p:cSld>
+    <p:bg>
+      <p:bgPr>
+        <a:solidFill>
+          <a:srgbClr val="F5F8FA"/>
+        </a:solidFill>
+        <a:effectLst/>
+      </p:bgPr>
+    </p:bg>
+    <p:spTree>
+      <p:nvGrpSpPr>
+        <p:cNvPr id="1" name=""/>
+        <p:cNvGrpSpPr/>
+        <p:nvPr/>
+      </p:nvGrpSpPr>
+      <p:grpSpPr/>
+      <p:sp>
+        <p:nvSpPr>
+          <p:cNvPr id="2" name="TextBox 1"/>
+          <p:cNvSpPr txBox="1"/>
+          <p:nvPr/>
+        </p:nvSpPr>
+        <p:spPr>
+          <a:xfrm>
+            <a:off x="11292840" y="6446520"/>
+            <a:ext cx="411480" cy="201168"/>
+          </a:xfrm>
+          <a:prstGeom prst="rect">
+            <a:avLst/>
+          </a:prstGeom>
+          <a:noFill/>
+        </p:spPr>
+        <p:txBody>
+          <a:bodyPr wrap="square" anchor="t" lIns="18288" rIns="18288" tIns="9144" bIns="9144">
+            <a:noAutofit/>
+          </a:bodyPr>
+          <a:lstStyle/>
+          <a:p>
+            <a:pPr algn="r">
+              <a:defRPr sz="900" b="0">
+                <a:solidFill>
+                  <a:srgbClr val="627987"/>
+                </a:solidFill>
+                <a:latin typeface="Microsoft YaHei"/>
+              </a:defRPr>
+            </a:pPr>
+            <a:r>
+              <a:t>5</a:t>
             </a:r>
           </a:p>
         </p:txBody>
